--- a/public/fun/pack/pptx/talkpro/발표템플릿프리미엄_11_사업제안_플럼샴페인.pptx
+++ b/public/fun/pack/pptx/talkpro/발표템플릿프리미엄_11_사업제안_플럼샴페인.pptx
@@ -115,12 +115,12 @@
   <p:extLst>
     <p:ext uri="{521415D9-36F7-43E2-AB2F-B90AF26B5E84}">
       <p14:sectionLst xmlns:p14="http://schemas.microsoft.com/office/powerpoint/2010/main">
-        <p14:section name="시작" id="{E44E2B63-7C1A-4504-957D-0C91A35860BA}">
+        <p14:section name="시작" id="{9FAB57AE-0F93-4C47-853F-944A3D924FF4}">
           <p14:sldIdLst>
             <p14:sldId id="256"/>
           </p14:sldIdLst>
         </p14:section>
-        <p14:section name="본문" id="{A20C106A-ABA2-413B-8791-9F2868F2AB64}">
+        <p14:section name="본문" id="{B43FD25F-4B56-4158-9A3B-417BCCE6B899}">
           <p14:sldIdLst>
             <p14:sldId id="257"/>
             <p14:sldId id="258"/>
@@ -131,7 +131,7 @@
             <p14:sldId id="263"/>
           </p14:sldIdLst>
         </p14:section>
-        <p14:section name="마무리" id="{1B071CFA-8B62-4FC4-A6AF-C1A067D4F56E}">
+        <p14:section name="마무리" id="{1687FF69-115E-414B-B6E0-5EDCBDA322FC}">
           <p14:sldIdLst>
             <p14:sldId id="264"/>
           </p14:sldIdLst>
@@ -2313,7 +2313,7 @@
             </a:lvl1pPr>
           </a:lstStyle>
           <a:p>
-            <a:fld id="{25A086B8-E077-4A9E-936B-2020BE934922}" type="slidenum">
+            <a:fld id="{534B189F-0D8B-4D5E-AF8E-64202F284B45}" type="slidenum">
               <a:rPr lang="en-US"/>
               <a:t>‹#›</a:t>
             </a:fld>
@@ -3362,7 +3362,7 @@
             </a:lvl1pPr>
           </a:lstStyle>
           <a:p>
-            <a:fld id="{062B3750-4A18-4614-9AFC-09437FBDCD09}" type="slidenum">
+            <a:fld id="{B58B8117-2E56-4A29-9E81-44EF8D4AAD08}" type="slidenum">
               <a:rPr lang="en-US"/>
               <a:t>‹#›</a:t>
             </a:fld>
@@ -3983,7 +3983,7 @@
             </a:lvl1pPr>
           </a:lstStyle>
           <a:p>
-            <a:fld id="{FA26267C-9C40-45B4-811C-454B5EE10862}" type="slidenum">
+            <a:fld id="{65663C7C-850F-4B2B-A7A5-01DCD553EB2B}" type="slidenum">
               <a:rPr lang="en-US"/>
               <a:t>‹#›</a:t>
             </a:fld>
@@ -4842,7 +4842,7 @@
           <a:p>
             <a:r>
               <a:rPr lang="ko-KR"/>
-              <a:t>0000. 00. 00</a:t>
+              <a:t>날짜 입력</a:t>
             </a:r>
           </a:p>
         </p:txBody>
@@ -4927,7 +4927,7 @@
           <a:bodyPr/>
           <a:lstStyle/>
           <a:p>
-            <a:fld id="{63932A5A-707F-4EE1-8764-0AA83AFF5EE2}" type="slidenum">
+            <a:fld id="{B06F1C0C-5AEF-4EF4-93D9-BDF5524B19E3}" type="slidenum">
               <a:rPr lang="en-US"/>
               <a:t>‹#›</a:t>
             </a:fld>
@@ -6201,7 +6201,7 @@
           <a:bodyPr/>
           <a:lstStyle/>
           <a:p>
-            <a:fld id="{486678E3-ED8E-4348-B853-AD01DD4DCC90}" type="slidenum">
+            <a:fld id="{8E13BD81-151B-4C39-935E-4303EEC22D7F}" type="slidenum">
               <a:rPr lang="en-US"/>
               <a:t>‹#›</a:t>
             </a:fld>
@@ -6289,7 +6289,7 @@
           <a:bodyPr/>
           <a:lstStyle/>
           <a:p>
-            <a:fld id="{3CF2CF0A-36BD-4FF5-B2C4-32643B10EADF}" type="slidenum">
+            <a:fld id="{28BBA5FF-C4AF-4207-91F9-A5F9209D65E2}" type="slidenum">
               <a:rPr lang="en-US"/>
               <a:t>‹#›</a:t>
             </a:fld>
@@ -7316,7 +7316,7 @@
           <a:bodyPr/>
           <a:lstStyle/>
           <a:p>
-            <a:fld id="{028C4224-624F-40F6-A219-33D339C6255E}" type="slidenum">
+            <a:fld id="{66BF0490-3073-41BF-85AA-51888B3A07A0}" type="slidenum">
               <a:rPr lang="en-US"/>
               <a:t>‹#›</a:t>
             </a:fld>
@@ -7968,7 +7968,7 @@
           <a:bodyPr/>
           <a:lstStyle/>
           <a:p>
-            <a:fld id="{756930D7-D066-407B-88D8-D757AE05223E}" type="slidenum">
+            <a:fld id="{0771B832-6765-40B8-A889-E07C4B9ED348}" type="slidenum">
               <a:rPr lang="en-US"/>
               <a:t>‹#›</a:t>
             </a:fld>
@@ -8148,7 +8148,7 @@
           <a:bodyPr/>
           <a:lstStyle/>
           <a:p>
-            <a:fld id="{1A4348E6-30B0-443F-AD10-A85315738AA3}" type="slidenum">
+            <a:fld id="{8E8C5DE9-2D20-4ADA-97BA-AAAA4B311878}" type="slidenum">
               <a:rPr lang="en-US"/>
               <a:t>‹#›</a:t>
             </a:fld>
@@ -9212,7 +9212,7 @@
           <a:bodyPr/>
           <a:lstStyle/>
           <a:p>
-            <a:fld id="{919788D2-3D72-4AB8-980E-4FBE60F29BDB}" type="slidenum">
+            <a:fld id="{C2EFF9A8-F6FF-4E5A-B750-1EF78EAFD204}" type="slidenum">
               <a:rPr lang="en-US"/>
               <a:t>‹#›</a:t>
             </a:fld>
